--- a/downloads/slides/FYE100-Module05-Instructor-Slides.pptx
+++ b/downloads/slides/FYE100-Module05-Instructor-Slides.pptx
@@ -117,18 +117,18 @@
   <p:extLst>
     <p:ext uri="{521415D9-36F7-43E2-AB2F-B90AF26B5E84}">
       <p14:sectionLst xmlns:p14="http://schemas.microsoft.com/office/powerpoint/2010/main">
-        <p14:section name="Opening" id="{c195a6a2-0f3f-d001-21e1-a91d5c0f4abe}">
+        <p14:section name="Opening" id="{5a6d3c6a-2903-2d85-de08-696764a7f8be}">
           <p14:sldIdLst>
             <p14:sldId id="256"/>
             <p14:sldId id="257"/>
           </p14:sldIdLst>
         </p14:section>
-        <p14:section name="This week" id="{2f3c269d-d805-61ca-b46c-0c9cc1821c85}">
+        <p14:section name="This week" id="{4af094ea-a89f-13f8-56de-2c4341983df0}">
           <p14:sldIdLst>
             <p14:sldId id="258"/>
           </p14:sldIdLst>
         </p14:section>
-        <p14:section name="Lessons" id="{4d644ea5-77bb-f412-f416-ea62eb1d08f6}">
+        <p14:section name="Lessons" id="{62307dbd-a9b7-8df2-889e-cc3394383015}">
           <p14:sldIdLst>
             <p14:sldId id="259"/>
             <p14:sldId id="260"/>
@@ -137,13 +137,13 @@
             <p14:sldId id="263"/>
           </p14:sldIdLst>
         </p14:section>
-        <p14:section name="This week's work" id="{f32fb5b7-f992-ed4f-19c4-8157c425e2c5}">
+        <p14:section name="This week's work" id="{413a3c73-310d-462f-abed-8091a96f1441}">
           <p14:sldIdLst>
             <p14:sldId id="264"/>
             <p14:sldId id="265"/>
           </p14:sldIdLst>
         </p14:section>
-        <p14:section name="Discussion" id="{5733916e-5402-b1f7-92d5-9b1b348ea6b1}">
+        <p14:section name="Discussion" id="{9fc5e0f5-c0d1-7a1f-e402-ec21aaf0801a}">
           <p14:sldIdLst>
             <p14:sldId id="266"/>
           </p14:sldIdLst>
@@ -1460,7 +1460,7 @@
             <a:r>
               <a:rPr lang="en-US" dirty="0"/>
               <a:t>Everything is due Monday by 11:59 PM Central.
-The Appreciative Advising Inventory is a short inventory, completion only. What students say in it shapes the course; the Instructor Guide's Results in Action page shows what changed because of it.
+The Appreciative Advising Inventory is a short inventory, completion only. Scan the code on this slide to open it; it's this semester's shared form for all FYE 100 sections. What students say in it shapes the course; the Instructor Guide's Results in Action page shows what changed because of it.
 Mile Marker #5 is the main assignment, with no dollar amounts required.
 Online sections: the money tip discussion. First post by Friday, replies by Monday. In-person sections: today's attendance counts.</a:t>
             </a:r>
@@ -7669,7 +7669,7 @@
       </p:sp>
       <p:sp>
         <p:nvSpPr>
-          <p:cNvPr id="4" name="Decorative: assignment row">
+          <p:cNvPr id="4" name="Decorative: QR panel">
             <a:extLst>
               <a:ext uri="{C183D7F6-B498-43B3-948B-1728B52AA6E4}">
                 <adec:decorative xmlns:adec="http://schemas.microsoft.com/office/drawing/2017/decorative" val="1"/>
@@ -7681,8 +7681,177 @@
         </p:nvSpPr>
         <p:spPr>
           <a:xfrm>
+            <a:off x="8534095" y="1874520"/>
+            <a:ext cx="3108960" cy="3977640"/>
+          </a:xfrm>
+          <a:prstGeom prst="roundRect">
+            <a:avLst>
+              <a:gd name="adj" fmla="val 3529"/>
+            </a:avLst>
+          </a:prstGeom>
+          <a:solidFill>
+            <a:srgbClr val="FFF5DC"/>
+          </a:solidFill>
+          <a:ln w="12700">
+            <a:solidFill>
+              <a:srgbClr val="FFF5DC"/>
+            </a:solidFill>
+            <a:prstDash val="solid"/>
+          </a:ln>
+          <a:effectLst>
+            <a:outerShdw sx="100000" sy="100000" kx="0" ky="0" algn="bl" rotWithShape="0" blurRad="101600" dist="25400" dir="5400000">
+              <a:srgbClr val="000000">
+                <a:alpha val="12000"/>
+              </a:srgbClr>
+            </a:outerShdw>
+          </a:effectLst>
+        </p:spPr>
+      </p:sp>
+      <p:sp>
+        <p:nvSpPr>
+          <p:cNvPr id="5" name="Text 3"/>
+          <p:cNvSpPr txBox="1"/>
+          <p:nvPr/>
+        </p:nvSpPr>
+        <p:spPr>
+          <a:xfrm>
+            <a:off x="8762695" y="2011680"/>
+            <a:ext cx="2651760" cy="685800"/>
+          </a:xfrm>
+          <a:prstGeom prst="rect">
+            <a:avLst/>
+          </a:prstGeom>
+          <a:noFill/>
+          <a:ln/>
+        </p:spPr>
+        <p:txBody>
+          <a:bodyPr wrap="square" lIns="0" tIns="0" rIns="0" bIns="0" rtlCol="0" anchor="ctr"/>
+          <a:lstStyle/>
+          <a:p>
+            <a:pPr algn="ctr" indent="0" marL="0">
+              <a:buNone/>
+            </a:pPr>
+            <a:r>
+              <a:rPr lang="en-US" sz="2000" b="1" dirty="0">
+                <a:solidFill>
+                  <a:schemeClr val="tx2"/>
+                </a:solidFill>
+              </a:rPr>
+              <a:t>Scan for the Inventory</a:t>
+            </a:r>
+            <a:endParaRPr lang="en-US" sz="2000" dirty="0"/>
+          </a:p>
+        </p:txBody>
+      </p:sp>
+      <p:sp>
+        <p:nvSpPr>
+          <p:cNvPr id="6" name="Decorative: QR frame">
+            <a:extLst>
+              <a:ext uri="{C183D7F6-B498-43B3-948B-1728B52AA6E4}">
+                <adec:decorative xmlns:adec="http://schemas.microsoft.com/office/drawing/2017/decorative" val="1"/>
+              </a:ext>
+            </a:extLst>
+          </p:cNvPr>
+          <p:cNvSpPr/>
+          <p:nvPr/>
+        </p:nvSpPr>
+        <p:spPr>
+          <a:xfrm>
+            <a:off x="8973007" y="2679192"/>
+            <a:ext cx="2231136" cy="2231136"/>
+          </a:xfrm>
+          <a:prstGeom prst="roundRect">
+            <a:avLst>
+              <a:gd name="adj" fmla="val 4098"/>
+            </a:avLst>
+          </a:prstGeom>
+          <a:solidFill>
+            <a:srgbClr val="FFFFFF"/>
+          </a:solidFill>
+          <a:ln w="12700">
+            <a:solidFill>
+              <a:srgbClr val="D9E2EA"/>
+            </a:solidFill>
+            <a:prstDash val="solid"/>
+          </a:ln>
+        </p:spPr>
+      </p:sp>
+      <p:pic>
+        <p:nvPicPr>
+          <p:cNvPr id="7" name="QR code: Scan for the Inventory" descr="QR code for Scan for the Inventory: https://forms.cloud.microsoft/r/J3LD45NjZX?origin=QRCode">    </p:cNvPr>
+          <p:cNvPicPr>
+            <a:picLocks noChangeAspect="1"/>
+          </p:cNvPicPr>
+          <p:nvPr/>
+        </p:nvPicPr>
+        <p:blipFill>
+          <a:blip r:embed="rId1"/>
+          <a:stretch>
+            <a:fillRect/>
+          </a:stretch>
+        </p:blipFill>
+        <p:spPr>
+          <a:xfrm>
+            <a:off x="9082735" y="2788920"/>
+            <a:ext cx="2011680" cy="2011680"/>
+          </a:xfrm>
+          <a:prstGeom prst="rect">
+            <a:avLst/>
+          </a:prstGeom>
+        </p:spPr>
+      </p:pic>
+      <p:sp>
+        <p:nvSpPr>
+          <p:cNvPr id="8" name="Address: Scan for the Inventory"/>
+          <p:cNvSpPr txBox="1"/>
+          <p:nvPr/>
+        </p:nvSpPr>
+        <p:spPr>
+          <a:xfrm>
+            <a:off x="8534095" y="4937760"/>
+            <a:ext cx="3108960" cy="731520"/>
+          </a:xfrm>
+          <a:prstGeom prst="rect">
+            <a:avLst/>
+          </a:prstGeom>
+          <a:noFill/>
+          <a:ln/>
+        </p:spPr>
+        <p:txBody>
+          <a:bodyPr wrap="square" lIns="0" tIns="0" rIns="0" bIns="0" rtlCol="0" anchor="t"/>
+          <a:lstStyle/>
+          <a:p>
+            <a:pPr algn="ctr" indent="0" marL="0">
+              <a:buNone/>
+            </a:pPr>
+            <a:r>
+              <a:rPr lang="en-US" sz="2000" dirty="0">
+                <a:solidFill>
+                  <a:schemeClr val="accent6"/>
+                </a:solidFill>
+              </a:rPr>
+              <a:t>forms.cloud.microsoft/r/J3LD45NjZX</a:t>
+            </a:r>
+            <a:endParaRPr lang="en-US" sz="2000" dirty="0"/>
+          </a:p>
+        </p:txBody>
+      </p:sp>
+      <p:sp>
+        <p:nvSpPr>
+          <p:cNvPr id="9" name="Decorative: assignment row">
+            <a:extLst>
+              <a:ext uri="{C183D7F6-B498-43B3-948B-1728B52AA6E4}">
+                <adec:decorative xmlns:adec="http://schemas.microsoft.com/office/drawing/2017/decorative" val="1"/>
+              </a:ext>
+            </a:extLst>
+          </p:cNvPr>
+          <p:cNvSpPr/>
+          <p:nvPr/>
+        </p:nvSpPr>
+        <p:spPr>
+          <a:xfrm>
             <a:off x="548640" y="1874520"/>
-            <a:ext cx="11094415" cy="841248"/>
+            <a:ext cx="7665415" cy="841248"/>
           </a:xfrm>
           <a:prstGeom prst="roundRect">
             <a:avLst>
@@ -7709,7 +7878,7 @@
       </p:sp>
       <p:sp>
         <p:nvSpPr>
-          <p:cNvPr id="5" name="Decorative: icon circle">
+          <p:cNvPr id="10" name="Decorative: icon circle">
             <a:extLst>
               <a:ext uri="{C183D7F6-B498-43B3-948B-1728B52AA6E4}">
                 <adec:decorative xmlns:adec="http://schemas.microsoft.com/office/drawing/2017/decorative" val="1"/>
@@ -7740,7 +7909,7 @@
       </p:sp>
       <p:pic>
         <p:nvPicPr>
-          <p:cNvPr id="6" name="Decorative: LuClipboardCheck">
+          <p:cNvPr id="11" name="Decorative: LuClipboardCheck">
             <a:extLst>
               <a:ext uri="{C183D7F6-B498-43B3-948B-1728B52AA6E4}">
                 <adec:decorative xmlns:adec="http://schemas.microsoft.com/office/drawing/2017/decorative" val="1"/>
@@ -7753,7 +7922,7 @@
           <p:nvPr/>
         </p:nvPicPr>
         <p:blipFill>
-          <a:blip r:embed="rId1"/>
+          <a:blip r:embed="rId2"/>
           <a:stretch>
             <a:fillRect/>
           </a:stretch>
@@ -7770,14 +7939,14 @@
       </p:pic>
       <p:sp>
         <p:nvSpPr>
-          <p:cNvPr id="7" name="Text 4"/>
+          <p:cNvPr id="12" name="Text 8"/>
           <p:cNvSpPr txBox="1"/>
           <p:nvPr/>
         </p:nvSpPr>
         <p:spPr>
           <a:xfrm>
             <a:off x="1508760" y="1929384"/>
-            <a:ext cx="9814255" cy="731520"/>
+            <a:ext cx="6385255" cy="731520"/>
           </a:xfrm>
           <a:prstGeom prst="rect">
             <a:avLst/>
@@ -7820,7 +7989,7 @@
       </p:sp>
       <p:sp>
         <p:nvSpPr>
-          <p:cNvPr id="8" name="Decorative: assignment row">
+          <p:cNvPr id="13" name="Decorative: assignment row">
             <a:extLst>
               <a:ext uri="{C183D7F6-B498-43B3-948B-1728B52AA6E4}">
                 <adec:decorative xmlns:adec="http://schemas.microsoft.com/office/drawing/2017/decorative" val="1"/>
@@ -7833,7 +8002,7 @@
         <p:spPr>
           <a:xfrm>
             <a:off x="548640" y="2880360"/>
-            <a:ext cx="11094415" cy="841248"/>
+            <a:ext cx="7665415" cy="841248"/>
           </a:xfrm>
           <a:prstGeom prst="roundRect">
             <a:avLst>
@@ -7860,7 +8029,7 @@
       </p:sp>
       <p:sp>
         <p:nvSpPr>
-          <p:cNvPr id="9" name="Decorative: icon circle">
+          <p:cNvPr id="14" name="Decorative: icon circle">
             <a:extLst>
               <a:ext uri="{C183D7F6-B498-43B3-948B-1728B52AA6E4}">
                 <adec:decorative xmlns:adec="http://schemas.microsoft.com/office/drawing/2017/decorative" val="1"/>
@@ -7891,7 +8060,7 @@
       </p:sp>
       <p:pic>
         <p:nvPicPr>
-          <p:cNvPr id="10" name="Decorative: LuFlag">
+          <p:cNvPr id="15" name="Decorative: LuFlag">
             <a:extLst>
               <a:ext uri="{C183D7F6-B498-43B3-948B-1728B52AA6E4}">
                 <adec:decorative xmlns:adec="http://schemas.microsoft.com/office/drawing/2017/decorative" val="1"/>
@@ -7904,7 +8073,7 @@
           <p:nvPr/>
         </p:nvPicPr>
         <p:blipFill>
-          <a:blip r:embed="rId2"/>
+          <a:blip r:embed="rId3"/>
           <a:stretch>
             <a:fillRect/>
           </a:stretch>
@@ -7921,14 +8090,14 @@
       </p:pic>
       <p:sp>
         <p:nvSpPr>
-          <p:cNvPr id="11" name="Text 7"/>
+          <p:cNvPr id="16" name="Text 11"/>
           <p:cNvSpPr txBox="1"/>
           <p:nvPr/>
         </p:nvSpPr>
         <p:spPr>
           <a:xfrm>
             <a:off x="1508760" y="2935224"/>
-            <a:ext cx="9814255" cy="731520"/>
+            <a:ext cx="6385255" cy="731520"/>
           </a:xfrm>
           <a:prstGeom prst="rect">
             <a:avLst/>
@@ -7971,7 +8140,7 @@
       </p:sp>
       <p:sp>
         <p:nvSpPr>
-          <p:cNvPr id="12" name="Decorative: assignment row">
+          <p:cNvPr id="17" name="Decorative: assignment row">
             <a:extLst>
               <a:ext uri="{C183D7F6-B498-43B3-948B-1728B52AA6E4}">
                 <adec:decorative xmlns:adec="http://schemas.microsoft.com/office/drawing/2017/decorative" val="1"/>
@@ -7984,7 +8153,7 @@
         <p:spPr>
           <a:xfrm>
             <a:off x="548640" y="3886200"/>
-            <a:ext cx="11094415" cy="841248"/>
+            <a:ext cx="7665415" cy="841248"/>
           </a:xfrm>
           <a:prstGeom prst="roundRect">
             <a:avLst>
@@ -8011,7 +8180,7 @@
       </p:sp>
       <p:sp>
         <p:nvSpPr>
-          <p:cNvPr id="13" name="Decorative: icon circle">
+          <p:cNvPr id="18" name="Decorative: icon circle">
             <a:extLst>
               <a:ext uri="{C183D7F6-B498-43B3-948B-1728B52AA6E4}">
                 <adec:decorative xmlns:adec="http://schemas.microsoft.com/office/drawing/2017/decorative" val="1"/>
@@ -8042,7 +8211,7 @@
       </p:sp>
       <p:pic>
         <p:nvPicPr>
-          <p:cNvPr id="14" name="Decorative: LuMessagesSquare">
+          <p:cNvPr id="19" name="Decorative: LuMessagesSquare">
             <a:extLst>
               <a:ext uri="{C183D7F6-B498-43B3-948B-1728B52AA6E4}">
                 <adec:decorative xmlns:adec="http://schemas.microsoft.com/office/drawing/2017/decorative" val="1"/>
@@ -8055,7 +8224,7 @@
           <p:nvPr/>
         </p:nvPicPr>
         <p:blipFill>
-          <a:blip r:embed="rId3"/>
+          <a:blip r:embed="rId4"/>
           <a:stretch>
             <a:fillRect/>
           </a:stretch>
@@ -8072,14 +8241,14 @@
       </p:pic>
       <p:sp>
         <p:nvSpPr>
-          <p:cNvPr id="15" name="Text 10"/>
+          <p:cNvPr id="20" name="Text 14"/>
           <p:cNvSpPr txBox="1"/>
           <p:nvPr/>
         </p:nvSpPr>
         <p:spPr>
           <a:xfrm>
             <a:off x="1508760" y="3941064"/>
-            <a:ext cx="9814255" cy="731520"/>
+            <a:ext cx="6385255" cy="731520"/>
           </a:xfrm>
           <a:prstGeom prst="rect">
             <a:avLst/>
